--- a/assets/proposal-template.pptx
+++ b/assets/proposal-template.pptx
@@ -475,7 +475,7 @@
           </a:p>
           <a:p xmlns:a="http://schemas.openxmlformats.org/drawingml/2006/main">
             <a:r>
-              <a:t>通用开题答辩模板，共28页，正文版式按七个章节排列。封面第1页、目录第3页、结束页第28页；第2、27页为说明页，正式稿删除。按材料选择同章版式，删除未选页面并重算页码。保留4∶3、白底、蓝色标题栏、黑体正文、红色强调、浅粉色小标题、蓝色总结框和虚线分隔。所有占位内容须按当前课题替换。研究现状一类一页，页面标明真实论文作者、刊会和年份；背景按3、6、1个图位保留，缺图框内留空；方案保留三条编号任务；所有公式使用可编辑MathType。实际PPT的备注先写可直接照读的学术演讲稿，再写内容来源。</a:t>
+              <a:t>通用开题答辩模板，共28页，正文版式按七个章节排列。封面第1页、目录第3页、结束页第28页；第2、27页为说明页，正式稿删除。按材料选择同章版式，删除未选页面并重算页码。保留4∶3、白底、蓝色标题栏、黑体正文、红色强调、浅粉色小标题、蓝色总结框和虚线分隔。所有占位内容须按当前课题替换。研究现状一类一页，页面标明真实论文作者、刊会和年份；背景按3、6、1个图位保留，缺图框内留空；方案保留三条编号任务；所有公式使用PowerPoint自带的原生可编辑公式，不能用普通文本拼接。实际PPT的备注先写可直接照读的学术演讲稿，再写内容来源。</a:t>
             </a:r>
           </a:p>
           <a:p xmlns:a="http://schemas.openxmlformats.org/drawingml/2006/main">
@@ -560,7 +560,7 @@
           </a:p>
           <a:p xmlns:a="http://schemas.openxmlformats.org/drawingml/2006/main">
             <a:r>
-              <a:t>通用开题答辩模板，共28页，正文版式按七个章节排列。封面第1页、目录第3页、结束页第28页；第2、27页为说明页，正式稿删除。按材料选择同章版式，删除未选页面并重算页码。保留4∶3、白底、蓝色标题栏、黑体正文、红色强调、浅粉色小标题、蓝色总结框和虚线分隔。所有占位内容须按当前课题替换。研究现状一类一页，页面标明真实论文作者、刊会和年份；背景按3、6、1个图位保留，缺图框内留空；方案保留三条编号任务；所有公式使用可编辑MathType。实际PPT的备注先写可直接照读的学术演讲稿，再写内容来源。</a:t>
+              <a:t>通用开题答辩模板，共28页，正文版式按七个章节排列。封面第1页、目录第3页、结束页第28页；第2、27页为说明页，正式稿删除。按材料选择同章版式，删除未选页面并重算页码。保留4∶3、白底、蓝色标题栏、黑体正文、红色强调、浅粉色小标题、蓝色总结框和虚线分隔。所有占位内容须按当前课题替换。研究现状一类一页，页面标明真实论文作者、刊会和年份；背景按3、6、1个图位保留，缺图框内留空；方案保留三条编号任务；所有公式使用PowerPoint自带的原生可编辑公式，不能用普通文本拼接。实际PPT的备注先写可直接照读的学术演讲稿，再写内容来源。</a:t>
             </a:r>
           </a:p>
           <a:p xmlns:a="http://schemas.openxmlformats.org/drawingml/2006/main">
@@ -645,7 +645,7 @@
           </a:p>
           <a:p xmlns:a="http://schemas.openxmlformats.org/drawingml/2006/main">
             <a:r>
-              <a:t>通用开题答辩模板，共28页，正文版式按七个章节排列。封面第1页、目录第3页、结束页第28页；第2、27页为说明页，正式稿删除。按材料选择同章版式，删除未选页面并重算页码。保留4∶3、白底、蓝色标题栏、黑体正文、红色强调、浅粉色小标题、蓝色总结框和虚线分隔。所有占位内容须按当前课题替换。研究现状一类一页，页面标明真实论文作者、刊会和年份；背景按3、6、1个图位保留，缺图框内留空；方案保留三条编号任务；所有公式使用可编辑MathType。实际PPT的备注先写可直接照读的学术演讲稿，再写内容来源。</a:t>
+              <a:t>通用开题答辩模板，共28页，正文版式按七个章节排列。封面第1页、目录第3页、结束页第28页；第2、27页为说明页，正式稿删除。按材料选择同章版式，删除未选页面并重算页码。保留4∶3、白底、蓝色标题栏、黑体正文、红色强调、浅粉色小标题、蓝色总结框和虚线分隔。所有占位内容须按当前课题替换。研究现状一类一页，页面标明真实论文作者、刊会和年份；背景按3、6、1个图位保留，缺图框内留空；方案保留三条编号任务；所有公式使用PowerPoint自带的原生可编辑公式，不能用普通文本拼接。实际PPT的备注先写可直接照读的学术演讲稿，再写内容来源。</a:t>
             </a:r>
           </a:p>
           <a:p xmlns:a="http://schemas.openxmlformats.org/drawingml/2006/main">
@@ -820,7 +820,7 @@
           </a:p>
           <a:p xmlns:a="http://schemas.openxmlformats.org/drawingml/2006/main">
             <a:r>
-              <a:t>通用开题答辩模板，共28页，正文版式按七个章节排列。封面第1页、目录第3页、结束页第28页；第2、27页为说明页，正式稿删除。按材料选择同章版式，删除未选页面并重算页码。保留4∶3、白底、蓝色标题栏、黑体正文、红色强调、浅粉色小标题、蓝色总结框和虚线分隔。所有占位内容须按当前课题替换。研究现状一类一页，页面标明真实论文作者、刊会和年份；背景按3、6、1个图位保留，缺图框内留空；方案保留三条编号任务；所有公式使用可编辑MathType。实际PPT的备注先写可直接照读的学术演讲稿，再写内容来源。</a:t>
+              <a:t>通用开题答辩模板，共28页，正文版式按七个章节排列。封面第1页、目录第3页、结束页第28页；第2、27页为说明页，正式稿删除。按材料选择同章版式，删除未选页面并重算页码。保留4∶3、白底、蓝色标题栏、黑体正文、红色强调、浅粉色小标题、蓝色总结框和虚线分隔。所有占位内容须按当前课题替换。研究现状一类一页，页面标明真实论文作者、刊会和年份；背景按3、6、1个图位保留，缺图框内留空；方案保留三条编号任务；所有公式使用PowerPoint自带的原生可编辑公式，不能用普通文本拼接。实际PPT的备注先写可直接照读的学术演讲稿，再写内容来源。</a:t>
             </a:r>
           </a:p>
           <a:p xmlns:a="http://schemas.openxmlformats.org/drawingml/2006/main">
@@ -905,7 +905,7 @@
           </a:p>
           <a:p xmlns:a="http://schemas.openxmlformats.org/drawingml/2006/main">
             <a:r>
-              <a:t>通用开题答辩模板，共28页，正文版式按七个章节排列。封面第1页、目录第3页、结束页第28页；第2、27页为说明页，正式稿删除。按材料选择同章版式，删除未选页面并重算页码。保留4∶3、白底、蓝色标题栏、黑体正文、红色强调、浅粉色小标题、蓝色总结框和虚线分隔。所有占位内容须按当前课题替换。研究现状一类一页，页面标明真实论文作者、刊会和年份；背景按3、6、1个图位保留，缺图框内留空；方案保留三条编号任务；所有公式使用可编辑MathType。实际PPT的备注先写可直接照读的学术演讲稿，再写内容来源。</a:t>
+              <a:t>通用开题答辩模板，共28页，正文版式按七个章节排列。封面第1页、目录第3页、结束页第28页；第2、27页为说明页，正式稿删除。按材料选择同章版式，删除未选页面并重算页码。保留4∶3、白底、蓝色标题栏、黑体正文、红色强调、浅粉色小标题、蓝色总结框和虚线分隔。所有占位内容须按当前课题替换。研究现状一类一页，页面标明真实论文作者、刊会和年份；背景按3、6、1个图位保留，缺图框内留空；方案保留三条编号任务；所有公式使用PowerPoint自带的原生可编辑公式，不能用普通文本拼接。实际PPT的备注先写可直接照读的学术演讲稿，再写内容来源。</a:t>
             </a:r>
           </a:p>
           <a:p xmlns:a="http://schemas.openxmlformats.org/drawingml/2006/main">
@@ -1080,7 +1080,7 @@
           </a:p>
           <a:p xmlns:a="http://schemas.openxmlformats.org/drawingml/2006/main">
             <a:r>
-              <a:t>通用开题答辩模板，共28页，正文版式按七个章节排列。封面第1页、目录第3页、结束页第28页；第2、27页为说明页，正式稿删除。按材料选择同章版式，删除未选页面并重算页码。保留4∶3、白底、蓝色标题栏、黑体正文、红色强调、浅粉色小标题、蓝色总结框和虚线分隔。所有占位内容须按当前课题替换。研究现状一类一页，页面标明真实论文作者、刊会和年份；背景按3、6、1个图位保留，缺图框内留空；方案保留三条编号任务；所有公式使用可编辑MathType。实际PPT的备注先写可直接照读的学术演讲稿，再写内容来源。</a:t>
+              <a:t>通用开题答辩模板，共28页，正文版式按七个章节排列。封面第1页、目录第3页、结束页第28页；第2、27页为说明页，正式稿删除。按材料选择同章版式，删除未选页面并重算页码。保留4∶3、白底、蓝色标题栏、黑体正文、红色强调、浅粉色小标题、蓝色总结框和虚线分隔。所有占位内容须按当前课题替换。研究现状一类一页，页面标明真实论文作者、刊会和年份；背景按3、6、1个图位保留，缺图框内留空；方案保留三条编号任务；所有公式使用PowerPoint自带的原生可编辑公式，不能用普通文本拼接。实际PPT的备注先写可直接照读的学术演讲稿，再写内容来源。</a:t>
             </a:r>
           </a:p>
           <a:p xmlns:a="http://schemas.openxmlformats.org/drawingml/2006/main">
@@ -1255,7 +1255,7 @@
           </a:p>
           <a:p xmlns:a="http://schemas.openxmlformats.org/drawingml/2006/main">
             <a:r>
-              <a:t>通用开题答辩模板，共28页，正文版式按七个章节排列。封面第1页、目录第3页、结束页第28页；第2、27页为说明页，正式稿删除。按材料选择同章版式，删除未选页面并重算页码。保留4∶3、白底、蓝色标题栏、黑体正文、红色强调、浅粉色小标题、蓝色总结框和虚线分隔。所有占位内容须按当前课题替换。研究现状一类一页，页面标明真实论文作者、刊会和年份；背景按3、6、1个图位保留，缺图框内留空；方案保留三条编号任务；所有公式使用可编辑MathType。实际PPT的备注先写可直接照读的学术演讲稿，再写内容来源。</a:t>
+              <a:t>通用开题答辩模板，共28页，正文版式按七个章节排列。封面第1页、目录第3页、结束页第28页；第2、27页为说明页，正式稿删除。按材料选择同章版式，删除未选页面并重算页码。保留4∶3、白底、蓝色标题栏、黑体正文、红色强调、浅粉色小标题、蓝色总结框和虚线分隔。所有占位内容须按当前课题替换。研究现状一类一页，页面标明真实论文作者、刊会和年份；背景按3、6、1个图位保留，缺图框内留空；方案保留三条编号任务；所有公式使用PowerPoint自带的原生可编辑公式，不能用普通文本拼接。实际PPT的备注先写可直接照读的学术演讲稿，再写内容来源。</a:t>
             </a:r>
           </a:p>
           <a:p xmlns:a="http://schemas.openxmlformats.org/drawingml/2006/main">
@@ -1340,7 +1340,7 @@
           </a:p>
           <a:p xmlns:a="http://schemas.openxmlformats.org/drawingml/2006/main">
             <a:r>
-              <a:t>通用开题答辩模板，共28页，正文版式按七个章节排列。封面第1页、目录第3页、结束页第28页；第2、27页为说明页，正式稿删除。按材料选择同章版式，删除未选页面并重算页码。保留4∶3、白底、蓝色标题栏、黑体正文、红色强调、浅粉色小标题、蓝色总结框和虚线分隔。所有占位内容须按当前课题替换。研究现状一类一页，页面标明真实论文作者、刊会和年份；背景按3、6、1个图位保留，缺图框内留空；方案保留三条编号任务；所有公式使用可编辑MathType。实际PPT的备注先写可直接照读的学术演讲稿，再写内容来源。</a:t>
+              <a:t>通用开题答辩模板，共28页，正文版式按七个章节排列。封面第1页、目录第3页、结束页第28页；第2、27页为说明页，正式稿删除。按材料选择同章版式，删除未选页面并重算页码。保留4∶3、白底、蓝色标题栏、黑体正文、红色强调、浅粉色小标题、蓝色总结框和虚线分隔。所有占位内容须按当前课题替换。研究现状一类一页，页面标明真实论文作者、刊会和年份；背景按3、6、1个图位保留，缺图框内留空；方案保留三条编号任务；所有公式使用PowerPoint自带的原生可编辑公式，不能用普通文本拼接。实际PPT的备注先写可直接照读的学术演讲稿，再写内容来源。</a:t>
             </a:r>
           </a:p>
           <a:p xmlns:a="http://schemas.openxmlformats.org/drawingml/2006/main">
@@ -1425,7 +1425,7 @@
           </a:p>
           <a:p xmlns:a="http://schemas.openxmlformats.org/drawingml/2006/main">
             <a:r>
-              <a:t>通用开题答辩模板，共28页，正文版式按七个章节排列。封面第1页、目录第3页、结束页第28页；第2、27页为说明页，正式稿删除。按材料选择同章版式，删除未选页面并重算页码。保留4∶3、白底、蓝色标题栏、黑体正文、红色强调、浅粉色小标题、蓝色总结框和虚线分隔。所有占位内容须按当前课题替换。研究现状一类一页，页面标明真实论文作者、刊会和年份；背景按3、6、1个图位保留，缺图框内留空；方案保留三条编号任务；所有公式使用可编辑MathType。实际PPT的备注先写可直接照读的学术演讲稿，再写内容来源。</a:t>
+              <a:t>通用开题答辩模板，共28页，正文版式按七个章节排列。封面第1页、目录第3页、结束页第28页；第2、27页为说明页，正式稿删除。按材料选择同章版式，删除未选页面并重算页码。保留4∶3、白底、蓝色标题栏、黑体正文、红色强调、浅粉色小标题、蓝色总结框和虚线分隔。所有占位内容须按当前课题替换。研究现状一类一页，页面标明真实论文作者、刊会和年份；背景按3、6、1个图位保留，缺图框内留空；方案保留三条编号任务；所有公式使用PowerPoint自带的原生可编辑公式，不能用普通文本拼接。实际PPT的备注先写可直接照读的学术演讲稿，再写内容来源。</a:t>
             </a:r>
           </a:p>
           <a:p xmlns:a="http://schemas.openxmlformats.org/drawingml/2006/main">
@@ -1510,7 +1510,7 @@
           </a:p>
           <a:p xmlns:a="http://schemas.openxmlformats.org/drawingml/2006/main">
             <a:r>
-              <a:t>通用开题答辩模板，共28页，正文版式按七个章节排列。封面第1页、目录第3页、结束页第28页；第2、27页为说明页，正式稿删除。按材料选择同章版式，删除未选页面并重算页码。保留4∶3、白底、蓝色标题栏、黑体正文、红色强调、浅粉色小标题、蓝色总结框和虚线分隔。所有占位内容须按当前课题替换。研究现状一类一页，页面标明真实论文作者、刊会和年份；背景按3、6、1个图位保留，缺图框内留空；方案保留三条编号任务；所有公式使用可编辑MathType。实际PPT的备注先写可直接照读的学术演讲稿，再写内容来源。</a:t>
+              <a:t>通用开题答辩模板，共28页，正文版式按七个章节排列。封面第1页、目录第3页、结束页第28页；第2、27页为说明页，正式稿删除。按材料选择同章版式，删除未选页面并重算页码。保留4∶3、白底、蓝色标题栏、黑体正文、红色强调、浅粉色小标题、蓝色总结框和虚线分隔。所有占位内容须按当前课题替换。研究现状一类一页，页面标明真实论文作者、刊会和年份；背景按3、6、1个图位保留，缺图框内留空；方案保留三条编号任务；所有公式使用PowerPoint自带的原生可编辑公式，不能用普通文本拼接。实际PPT的备注先写可直接照读的学术演讲稿，再写内容来源。</a:t>
             </a:r>
           </a:p>
           <a:p xmlns:a="http://schemas.openxmlformats.org/drawingml/2006/main">
@@ -1685,7 +1685,7 @@
           </a:p>
           <a:p xmlns:a="http://schemas.openxmlformats.org/drawingml/2006/main">
             <a:r>
-              <a:t>通用开题答辩模板，共28页，正文版式按七个章节排列。封面第1页、目录第3页、结束页第28页；第2、27页为说明页，正式稿删除。按材料选择同章版式，删除未选页面并重算页码。保留4∶3、白底、蓝色标题栏、黑体正文、红色强调、浅粉色小标题、蓝色总结框和虚线分隔。所有占位内容须按当前课题替换。研究现状一类一页，页面标明真实论文作者、刊会和年份；背景按3、6、1个图位保留，缺图框内留空；方案保留三条编号任务；所有公式使用可编辑MathType。实际PPT的备注先写可直接照读的学术演讲稿，再写内容来源。</a:t>
+              <a:t>通用开题答辩模板，共28页，正文版式按七个章节排列。封面第1页、目录第3页、结束页第28页；第2、27页为说明页，正式稿删除。按材料选择同章版式，删除未选页面并重算页码。保留4∶3、白底、蓝色标题栏、黑体正文、红色强调、浅粉色小标题、蓝色总结框和虚线分隔。所有占位内容须按当前课题替换。研究现状一类一页，页面标明真实论文作者、刊会和年份；背景按3、6、1个图位保留，缺图框内留空；方案保留三条编号任务；所有公式使用PowerPoint自带的原生可编辑公式，不能用普通文本拼接。实际PPT的备注先写可直接照读的学术演讲稿，再写内容来源。</a:t>
             </a:r>
           </a:p>
           <a:p xmlns:a="http://schemas.openxmlformats.org/drawingml/2006/main">
@@ -1770,7 +1770,7 @@
           </a:p>
           <a:p xmlns:a="http://schemas.openxmlformats.org/drawingml/2006/main">
             <a:r>
-              <a:t>通用开题答辩模板，共28页，正文版式按七个章节排列。封面第1页、目录第3页、结束页第28页；第2、27页为说明页，正式稿删除。按材料选择同章版式，删除未选页面并重算页码。保留4∶3、白底、蓝色标题栏、黑体正文、红色强调、浅粉色小标题、蓝色总结框和虚线分隔。所有占位内容须按当前课题替换。研究现状一类一页，页面标明真实论文作者、刊会和年份；背景按3、6、1个图位保留，缺图框内留空；方案保留三条编号任务；所有公式使用可编辑MathType。实际PPT的备注先写可直接照读的学术演讲稿，再写内容来源。</a:t>
+              <a:t>通用开题答辩模板，共28页，正文版式按七个章节排列。封面第1页、目录第3页、结束页第28页；第2、27页为说明页，正式稿删除。按材料选择同章版式，删除未选页面并重算页码。保留4∶3、白底、蓝色标题栏、黑体正文、红色强调、浅粉色小标题、蓝色总结框和虚线分隔。所有占位内容须按当前课题替换。研究现状一类一页，页面标明真实论文作者、刊会和年份；背景按3、6、1个图位保留，缺图框内留空；方案保留三条编号任务；所有公式使用PowerPoint自带的原生可编辑公式，不能用普通文本拼接。实际PPT的备注先写可直接照读的学术演讲稿，再写内容来源。</a:t>
             </a:r>
           </a:p>
           <a:p xmlns:a="http://schemas.openxmlformats.org/drawingml/2006/main">
@@ -1945,7 +1945,7 @@
           </a:p>
           <a:p xmlns:a="http://schemas.openxmlformats.org/drawingml/2006/main">
             <a:r>
-              <a:t>通用开题答辩模板，共28页，正文版式按七个章节排列。封面第1页、目录第3页、结束页第28页；第2、27页为说明页，正式稿删除。按材料选择同章版式，删除未选页面并重算页码。保留4∶3、白底、蓝色标题栏、黑体正文、红色强调、浅粉色小标题、蓝色总结框和虚线分隔。所有占位内容须按当前课题替换。研究现状一类一页，页面标明真实论文作者、刊会和年份；背景按3、6、1个图位保留，缺图框内留空；方案保留三条编号任务；所有公式使用可编辑MathType。实际PPT的备注先写可直接照读的学术演讲稿，再写内容来源。</a:t>
+              <a:t>通用开题答辩模板，共28页，正文版式按七个章节排列。封面第1页、目录第3页、结束页第28页；第2、27页为说明页，正式稿删除。按材料选择同章版式，删除未选页面并重算页码。保留4∶3、白底、蓝色标题栏、黑体正文、红色强调、浅粉色小标题、蓝色总结框和虚线分隔。所有占位内容须按当前课题替换。研究现状一类一页，页面标明真实论文作者、刊会和年份；背景按3、6、1个图位保留，缺图框内留空；方案保留三条编号任务；所有公式使用PowerPoint自带的原生可编辑公式，不能用普通文本拼接。实际PPT的备注先写可直接照读的学术演讲稿，再写内容来源。</a:t>
             </a:r>
           </a:p>
           <a:p xmlns:a="http://schemas.openxmlformats.org/drawingml/2006/main">
@@ -2120,7 +2120,7 @@
           </a:p>
           <a:p xmlns:a="http://schemas.openxmlformats.org/drawingml/2006/main">
             <a:r>
-              <a:t>通用开题答辩模板，共28页，正文版式按七个章节排列。封面第1页、目录第3页、结束页第28页；第2、27页为说明页，正式稿删除。按材料选择同章版式，删除未选页面并重算页码。保留4∶3、白底、蓝色标题栏、黑体正文、红色强调、浅粉色小标题、蓝色总结框和虚线分隔。所有占位内容须按当前课题替换。研究现状一类一页，页面标明真实论文作者、刊会和年份；背景按3、6、1个图位保留，缺图框内留空；方案保留三条编号任务；所有公式使用可编辑MathType。实际PPT的备注先写可直接照读的学术演讲稿，再写内容来源。</a:t>
+              <a:t>通用开题答辩模板，共28页，正文版式按七个章节排列。封面第1页、目录第3页、结束页第28页；第2、27页为说明页，正式稿删除。按材料选择同章版式，删除未选页面并重算页码。保留4∶3、白底、蓝色标题栏、黑体正文、红色强调、浅粉色小标题、蓝色总结框和虚线分隔。所有占位内容须按当前课题替换。研究现状一类一页，页面标明真实论文作者、刊会和年份；背景按3、6、1个图位保留，缺图框内留空；方案保留三条编号任务；所有公式使用PowerPoint自带的原生可编辑公式，不能用普通文本拼接。实际PPT的备注先写可直接照读的学术演讲稿，再写内容来源。</a:t>
             </a:r>
           </a:p>
           <a:p xmlns:a="http://schemas.openxmlformats.org/drawingml/2006/main">
@@ -2205,7 +2205,7 @@
           </a:p>
           <a:p xmlns:a="http://schemas.openxmlformats.org/drawingml/2006/main">
             <a:r>
-              <a:t>通用开题答辩模板，共28页，正文版式按七个章节排列。封面第1页、目录第3页、结束页第28页；第2、27页为说明页，正式稿删除。按材料选择同章版式，删除未选页面并重算页码。保留4∶3、白底、蓝色标题栏、黑体正文、红色强调、浅粉色小标题、蓝色总结框和虚线分隔。所有占位内容须按当前课题替换。研究现状一类一页，页面标明真实论文作者、刊会和年份；背景按3、6、1个图位保留，缺图框内留空；方案保留三条编号任务；所有公式使用可编辑MathType。实际PPT的备注先写可直接照读的学术演讲稿，再写内容来源。</a:t>
+              <a:t>通用开题答辩模板，共28页，正文版式按七个章节排列。封面第1页、目录第3页、结束页第28页；第2、27页为说明页，正式稿删除。按材料选择同章版式，删除未选页面并重算页码。保留4∶3、白底、蓝色标题栏、黑体正文、红色强调、浅粉色小标题、蓝色总结框和虚线分隔。所有占位内容须按当前课题替换。研究现状一类一页，页面标明真实论文作者、刊会和年份；背景按3、6、1个图位保留，缺图框内留空；方案保留三条编号任务；所有公式使用PowerPoint自带的原生可编辑公式，不能用普通文本拼接。实际PPT的备注先写可直接照读的学术演讲稿，再写内容来源。</a:t>
             </a:r>
           </a:p>
           <a:p xmlns:a="http://schemas.openxmlformats.org/drawingml/2006/main">
@@ -2290,7 +2290,7 @@
           </a:p>
           <a:p xmlns:a="http://schemas.openxmlformats.org/drawingml/2006/main">
             <a:r>
-              <a:t>通用开题答辩模板，共28页，正文版式按七个章节排列。封面第1页、目录第3页、结束页第28页；第2、27页为说明页，正式稿删除。按材料选择同章版式，删除未选页面并重算页码。保留4∶3、白底、蓝色标题栏、黑体正文、红色强调、浅粉色小标题、蓝色总结框和虚线分隔。所有占位内容须按当前课题替换。研究现状一类一页，页面标明真实论文作者、刊会和年份；背景按3、6、1个图位保留，缺图框内留空；方案保留三条编号任务；所有公式使用可编辑MathType。实际PPT的备注先写可直接照读的学术演讲稿，再写内容来源。</a:t>
+              <a:t>通用开题答辩模板，共28页，正文版式按七个章节排列。封面第1页、目录第3页、结束页第28页；第2、27页为说明页，正式稿删除。按材料选择同章版式，删除未选页面并重算页码。保留4∶3、白底、蓝色标题栏、黑体正文、红色强调、浅粉色小标题、蓝色总结框和虚线分隔。所有占位内容须按当前课题替换。研究现状一类一页，页面标明真实论文作者、刊会和年份；背景按3、6、1个图位保留，缺图框内留空；方案保留三条编号任务；所有公式使用PowerPoint自带的原生可编辑公式，不能用普通文本拼接。实际PPT的备注先写可直接照读的学术演讲稿，再写内容来源。</a:t>
             </a:r>
           </a:p>
           <a:p xmlns:a="http://schemas.openxmlformats.org/drawingml/2006/main">
@@ -2375,7 +2375,7 @@
           </a:p>
           <a:p xmlns:a="http://schemas.openxmlformats.org/drawingml/2006/main">
             <a:r>
-              <a:t>通用开题答辩模板，共28页，正文版式按七个章节排列。封面第1页、目录第3页、结束页第28页；第2、27页为说明页，正式稿删除。按材料选择同章版式，删除未选页面并重算页码。保留4∶3、白底、蓝色标题栏、黑体正文、红色强调、浅粉色小标题、蓝色总结框和虚线分隔。所有占位内容须按当前课题替换。研究现状一类一页，页面标明真实论文作者、刊会和年份；背景按3、6、1个图位保留，缺图框内留空；方案保留三条编号任务；所有公式使用可编辑MathType。实际PPT的备注先写可直接照读的学术演讲稿，再写内容来源。</a:t>
+              <a:t>通用开题答辩模板，共28页，正文版式按七个章节排列。封面第1页、目录第3页、结束页第28页；第2、27页为说明页，正式稿删除。按材料选择同章版式，删除未选页面并重算页码。保留4∶3、白底、蓝色标题栏、黑体正文、红色强调、浅粉色小标题、蓝色总结框和虚线分隔。所有占位内容须按当前课题替换。研究现状一类一页，页面标明真实论文作者、刊会和年份；背景按3、6、1个图位保留，缺图框内留空；方案保留三条编号任务；所有公式使用PowerPoint自带的原生可编辑公式，不能用普通文本拼接。实际PPT的备注先写可直接照读的学术演讲稿，再写内容来源。</a:t>
             </a:r>
           </a:p>
           <a:p xmlns:a="http://schemas.openxmlformats.org/drawingml/2006/main">
@@ -2550,7 +2550,7 @@
           </a:p>
           <a:p xmlns:a="http://schemas.openxmlformats.org/drawingml/2006/main">
             <a:r>
-              <a:t>通用开题答辩模板，共28页，正文版式按七个章节排列。封面第1页、目录第3页、结束页第28页；第2、27页为说明页，正式稿删除。按材料选择同章版式，删除未选页面并重算页码。保留4∶3、白底、蓝色标题栏、黑体正文、红色强调、浅粉色小标题、蓝色总结框和虚线分隔。所有占位内容须按当前课题替换。研究现状一类一页，页面标明真实论文作者、刊会和年份；背景按3、6、1个图位保留，缺图框内留空；方案保留三条编号任务；所有公式使用可编辑MathType。实际PPT的备注先写可直接照读的学术演讲稿，再写内容来源。</a:t>
+              <a:t>通用开题答辩模板，共28页，正文版式按七个章节排列。封面第1页、目录第3页、结束页第28页；第2、27页为说明页，正式稿删除。按材料选择同章版式，删除未选页面并重算页码。保留4∶3、白底、蓝色标题栏、黑体正文、红色强调、浅粉色小标题、蓝色总结框和虚线分隔。所有占位内容须按当前课题替换。研究现状一类一页，页面标明真实论文作者、刊会和年份；背景按3、6、1个图位保留，缺图框内留空；方案保留三条编号任务；所有公式使用PowerPoint自带的原生可编辑公式，不能用普通文本拼接。实际PPT的备注先写可直接照读的学术演讲稿，再写内容来源。</a:t>
             </a:r>
           </a:p>
           <a:p xmlns:a="http://schemas.openxmlformats.org/drawingml/2006/main">
@@ -2725,7 +2725,7 @@
           </a:p>
           <a:p xmlns:a="http://schemas.openxmlformats.org/drawingml/2006/main">
             <a:r>
-              <a:t>通用开题答辩模板，共28页，正文版式按七个章节排列。封面第1页、目录第3页、结束页第28页；第2、27页为说明页，正式稿删除。按材料选择同章版式，删除未选页面并重算页码。保留4∶3、白底、蓝色标题栏、黑体正文、红色强调、浅粉色小标题、蓝色总结框和虚线分隔。所有占位内容须按当前课题替换。研究现状一类一页，页面标明真实论文作者、刊会和年份；背景按3、6、1个图位保留，缺图框内留空；方案保留三条编号任务；所有公式使用可编辑MathType。实际PPT的备注先写可直接照读的学术演讲稿，再写内容来源。</a:t>
+              <a:t>通用开题答辩模板，共28页，正文版式按七个章节排列。封面第1页、目录第3页、结束页第28页；第2、27页为说明页，正式稿删除。按材料选择同章版式，删除未选页面并重算页码。保留4∶3、白底、蓝色标题栏、黑体正文、红色强调、浅粉色小标题、蓝色总结框和虚线分隔。所有占位内容须按当前课题替换。研究现状一类一页，页面标明真实论文作者、刊会和年份；背景按3、6、1个图位保留，缺图框内留空；方案保留三条编号任务；所有公式使用PowerPoint自带的原生可编辑公式，不能用普通文本拼接。实际PPT的备注先写可直接照读的学术演讲稿，再写内容来源。</a:t>
             </a:r>
           </a:p>
           <a:p xmlns:a="http://schemas.openxmlformats.org/drawingml/2006/main">
@@ -2810,7 +2810,7 @@
           </a:p>
           <a:p xmlns:a="http://schemas.openxmlformats.org/drawingml/2006/main">
             <a:r>
-              <a:t>通用开题答辩模板，共28页，正文版式按七个章节排列。封面第1页、目录第3页、结束页第28页；第2、27页为说明页，正式稿删除。按材料选择同章版式，删除未选页面并重算页码。保留4∶3、白底、蓝色标题栏、黑体正文、红色强调、浅粉色小标题、蓝色总结框和虚线分隔。所有占位内容须按当前课题替换。研究现状一类一页，页面标明真实论文作者、刊会和年份；背景按3、6、1个图位保留，缺图框内留空；方案保留三条编号任务；所有公式使用可编辑MathType。实际PPT的备注先写可直接照读的学术演讲稿，再写内容来源。</a:t>
+              <a:t>通用开题答辩模板，共28页，正文版式按七个章节排列。封面第1页、目录第3页、结束页第28页；第2、27页为说明页，正式稿删除。按材料选择同章版式，删除未选页面并重算页码。保留4∶3、白底、蓝色标题栏、黑体正文、红色强调、浅粉色小标题、蓝色总结框和虚线分隔。所有占位内容须按当前课题替换。研究现状一类一页，页面标明真实论文作者、刊会和年份；背景按3、6、1个图位保留，缺图框内留空；方案保留三条编号任务；所有公式使用PowerPoint自带的原生可编辑公式，不能用普通文本拼接。实际PPT的备注先写可直接照读的学术演讲稿，再写内容来源。</a:t>
             </a:r>
           </a:p>
           <a:p xmlns:a="http://schemas.openxmlformats.org/drawingml/2006/main">
